--- a/tools/FreeP.RenderCompare/corpus/22-chart-baseline-depth.pptx
+++ b/tools/FreeP.RenderCompare/corpus/22-chart-baseline-depth.pptx
@@ -341,7 +341,7 @@
               <c:strCache>
                 <c:ptCount val="1"/>
                 <c:pt idx="0">
-                  <c:v>High band</c:v>
+                  <c:v>Mid band</c:v>
                 </c:pt>
               </c:strCache>
             </c:strRef>
@@ -366,6 +366,56 @@
           <c:val>
             <c:numRef>
               <c:f>ChartData!$C$2:$C$4</c:f>
+              <c:numCache>
+                <c:formatCode>General</c:formatCode>
+                <c:ptCount val="3"/>
+                <c:pt idx="0">
+                  <c:v>18</c:v>
+                </c:pt>
+                <c:pt idx="1">
+                  <c:v>22</c:v>
+                </c:pt>
+                <c:pt idx="2">
+                  <c:v>26</c:v>
+                </c:pt>
+              </c:numCache>
+            </c:numRef>
+          </c:val>
+        </c:ser>
+        <c:ser>
+          <c:idx val="2"/>
+          <c:order val="2"/>
+          <c:tx>
+            <c:strRef>
+              <c:f>ChartData!$D$1</c:f>
+              <c:strCache>
+                <c:ptCount val="1"/>
+                <c:pt idx="0">
+                  <c:v>High band</c:v>
+                </c:pt>
+              </c:strCache>
+            </c:strRef>
+          </c:tx>
+          <c:cat>
+            <c:strRef>
+              <c:f>ChartData!$A$2:$A$4</c:f>
+              <c:strCache>
+                <c:ptCount val="3"/>
+                <c:pt idx="0">
+                  <c:v>North</c:v>
+                </c:pt>
+                <c:pt idx="1">
+                  <c:v>East</c:v>
+                </c:pt>
+                <c:pt idx="2">
+                  <c:v>South</c:v>
+                </c:pt>
+              </c:strCache>
+            </c:strRef>
+          </c:cat>
+          <c:val>
+            <c:numRef>
+              <c:f>ChartData!$D$2:$D$4</c:f>
               <c:numCache>
                 <c:formatCode>General</c:formatCode>
                 <c:ptCount val="3"/>

--- a/tools/FreeP.RenderCompare/corpus/22-chart-baseline-depth.pptx
+++ b/tools/FreeP.RenderCompare/corpus/22-chart-baseline-depth.pptx
@@ -468,7 +468,6 @@
         <c:tickLblPos val="nextTo"/>
         <c:crossAx val="2"/>
         <c:crosses val="autoZero"/>
-        <c:lblOffset val="100"/>
       </c:serAx>
     </c:plotArea>
     <c:plotVisOnly val="1"/>
@@ -999,9 +998,13 @@
     <a:fontScheme name="Office Theme">
       <a:majorFont>
         <a:latin typeface="Calibri Light"/>
+        <a:ea typeface=""/>
+        <a:cs typeface=""/>
       </a:majorFont>
       <a:minorFont>
         <a:latin typeface="Calibri"/>
+        <a:ea typeface=""/>
+        <a:cs typeface=""/>
       </a:minorFont>
     </a:fontScheme>
     <a:fmtScheme name="Office">

--- a/tools/FreeP.RenderCompare/corpus/22-chart-baseline-depth.pptx
+++ b/tools/FreeP.RenderCompare/corpus/22-chart-baseline-depth.pptx
@@ -9,6 +9,101 @@
   </p:sldIdLst>
   <p:sldSz cx="12192000" cy="6858000" type="screen16x9"/>
   <p:notesSz cx="6858000" cy="9144000"/>
+  <p:defaultTextStyle>
+    <a:defPPr>
+      <a:defRPr lang="en-US"/>
+    </a:defPPr>
+    <a:lvl1pPr marL="0" algn="l" defTabSz="914400" rtl="0" eaLnBrk="1" latinLnBrk="0" hangingPunct="1">
+      <a:defRPr sz="1800" kern="1200">
+        <a:solidFill>
+          <a:schemeClr val="tx1"/>
+        </a:solidFill>
+        <a:latin typeface="+mn-lt"/>
+        <a:ea typeface="+mn-ea"/>
+        <a:cs typeface="+mn-cs"/>
+      </a:defRPr>
+    </a:lvl1pPr>
+    <a:lvl2pPr marL="457200" algn="l" defTabSz="914400" rtl="0" eaLnBrk="1" latinLnBrk="0" hangingPunct="1">
+      <a:defRPr sz="1800" kern="1200">
+        <a:solidFill>
+          <a:schemeClr val="tx1"/>
+        </a:solidFill>
+        <a:latin typeface="+mn-lt"/>
+        <a:ea typeface="+mn-ea"/>
+        <a:cs typeface="+mn-cs"/>
+      </a:defRPr>
+    </a:lvl2pPr>
+    <a:lvl3pPr marL="914400" algn="l" defTabSz="914400" rtl="0" eaLnBrk="1" latinLnBrk="0" hangingPunct="1">
+      <a:defRPr sz="1800" kern="1200">
+        <a:solidFill>
+          <a:schemeClr val="tx1"/>
+        </a:solidFill>
+        <a:latin typeface="+mn-lt"/>
+        <a:ea typeface="+mn-ea"/>
+        <a:cs typeface="+mn-cs"/>
+      </a:defRPr>
+    </a:lvl3pPr>
+    <a:lvl4pPr marL="1371600" algn="l" defTabSz="914400" rtl="0" eaLnBrk="1" latinLnBrk="0" hangingPunct="1">
+      <a:defRPr sz="1800" kern="1200">
+        <a:solidFill>
+          <a:schemeClr val="tx1"/>
+        </a:solidFill>
+        <a:latin typeface="+mn-lt"/>
+        <a:ea typeface="+mn-ea"/>
+        <a:cs typeface="+mn-cs"/>
+      </a:defRPr>
+    </a:lvl4pPr>
+    <a:lvl5pPr marL="1828800" algn="l" defTabSz="914400" rtl="0" eaLnBrk="1" latinLnBrk="0" hangingPunct="1">
+      <a:defRPr sz="1800" kern="1200">
+        <a:solidFill>
+          <a:schemeClr val="tx1"/>
+        </a:solidFill>
+        <a:latin typeface="+mn-lt"/>
+        <a:ea typeface="+mn-ea"/>
+        <a:cs typeface="+mn-cs"/>
+      </a:defRPr>
+    </a:lvl5pPr>
+    <a:lvl6pPr marL="2286000" algn="l" defTabSz="914400" rtl="0" eaLnBrk="1" latinLnBrk="0" hangingPunct="1">
+      <a:defRPr sz="1800" kern="1200">
+        <a:solidFill>
+          <a:schemeClr val="tx1"/>
+        </a:solidFill>
+        <a:latin typeface="+mn-lt"/>
+        <a:ea typeface="+mn-ea"/>
+        <a:cs typeface="+mn-cs"/>
+      </a:defRPr>
+    </a:lvl6pPr>
+    <a:lvl7pPr marL="2743200" algn="l" defTabSz="914400" rtl="0" eaLnBrk="1" latinLnBrk="0" hangingPunct="1">
+      <a:defRPr sz="1800" kern="1200">
+        <a:solidFill>
+          <a:schemeClr val="tx1"/>
+        </a:solidFill>
+        <a:latin typeface="+mn-lt"/>
+        <a:ea typeface="+mn-ea"/>
+        <a:cs typeface="+mn-cs"/>
+      </a:defRPr>
+    </a:lvl7pPr>
+    <a:lvl8pPr marL="3200400" algn="l" defTabSz="914400" rtl="0" eaLnBrk="1" latinLnBrk="0" hangingPunct="1">
+      <a:defRPr sz="1800" kern="1200">
+        <a:solidFill>
+          <a:schemeClr val="tx1"/>
+        </a:solidFill>
+        <a:latin typeface="+mn-lt"/>
+        <a:ea typeface="+mn-ea"/>
+        <a:cs typeface="+mn-cs"/>
+      </a:defRPr>
+    </a:lvl8pPr>
+    <a:lvl9pPr marL="3657600" algn="l" defTabSz="914400" rtl="0" eaLnBrk="1" latinLnBrk="0" hangingPunct="1">
+      <a:defRPr sz="1800" kern="1200">
+        <a:solidFill>
+          <a:schemeClr val="tx1"/>
+        </a:solidFill>
+        <a:latin typeface="+mn-lt"/>
+        <a:ea typeface="+mn-ea"/>
+        <a:cs typeface="+mn-cs"/>
+      </a:defRPr>
+    </a:lvl9pPr>
+  </p:defaultTextStyle>
 </p:presentation>
 </file>
 
@@ -232,6 +327,7 @@
             </c:numRef>
           </c:val>
         </c:ser>
+        <c:hiLowLines/>
         <c:axId val="1"/>
         <c:axId val="2"/>
       </c:stockChart>

--- a/tools/FreeP.RenderCompare/corpus/22-chart-baseline-depth.pptx
+++ b/tools/FreeP.RenderCompare/corpus/22-chart-baseline-depth.pptx
@@ -327,7 +327,6 @@
             </c:numRef>
           </c:val>
         </c:ser>
-        <c:hiLowLines/>
         <c:axId val="1"/>
         <c:axId val="2"/>
       </c:stockChart>
